--- a/media/resources/files/EkiOrunduuOnduktar_Koboytuu_Jenil_Orto_Oor_OEg70Ty.pptx
+++ b/media/resources/files/EkiOrunduuOnduktar_Koboytuu_Jenil_Orto_Oor_OEg70Ty.pptx
@@ -7640,7 +7640,7 @@
                 <a:ea typeface="+mn-ea"/>
                 <a:cs typeface="+mn-cs"/>
               </a:rPr>
-              <a:t>Турдуу пикирлер учун ыраазычылык билдиребиз.</a:t>
+              <a:t>Түрдүү пикирлер үчүн ыраазычылык билдиребиз.</a:t>
             </a:r>
           </a:p>
           <a:p>

--- a/media/resources/files/EkiOrunduuOnduktar_Koboytuu_Jenil_Orto_Oor_OEg70Ty.pptx
+++ b/media/resources/files/EkiOrunduuOnduktar_Koboytuu_Jenil_Orto_Oor_OEg70Ty.pptx
@@ -2029,7 +2029,7 @@
             <a:pPr algn="ctr"/>
             <a:r>
               <a:rPr lang="en-GB" sz="2000" dirty="0"/>
-              <a:t>6 × 0.1</a:t>
+              <a:t>6 × 0,1</a:t>
             </a:r>
           </a:p>
         </p:txBody>
@@ -2106,7 +2106,7 @@
             <a:pPr algn="ctr"/>
             <a:r>
               <a:rPr lang="en-GB" sz="2000" dirty="0"/>
-              <a:t>9 × 0.01</a:t>
+              <a:t>9 × 0,01</a:t>
             </a:r>
           </a:p>
         </p:txBody>
@@ -2183,7 +2183,7 @@
             <a:pPr algn="ctr"/>
             <a:r>
               <a:rPr lang="en-GB" sz="2000" dirty="0"/>
-              <a:t>8 × 0.3</a:t>
+              <a:t>8 × 0,3</a:t>
             </a:r>
           </a:p>
         </p:txBody>
@@ -2260,7 +2260,7 @@
             <a:pPr algn="ctr"/>
             <a:r>
               <a:rPr lang="en-GB" sz="2000" dirty="0"/>
-              <a:t>2.2 × 4</a:t>
+              <a:t>2,2 × 4</a:t>
             </a:r>
           </a:p>
         </p:txBody>
@@ -2337,7 +2337,7 @@
             <a:pPr algn="ctr"/>
             <a:r>
               <a:rPr lang="en-GB" sz="2000" dirty="0"/>
-              <a:t>0.26 × 2</a:t>
+              <a:t>0,26 × 2</a:t>
             </a:r>
           </a:p>
         </p:txBody>
@@ -2414,7 +2414,7 @@
             <a:pPr algn="ctr"/>
             <a:r>
               <a:rPr lang="en-GB" sz="2000" dirty="0"/>
-              <a:t>3.12 × 4</a:t>
+              <a:t>3,12 × 4</a:t>
             </a:r>
           </a:p>
         </p:txBody>
@@ -2532,7 +2532,7 @@
             <a:pPr algn="ctr"/>
             <a:r>
               <a:rPr lang="en-GB" sz="2000" dirty="0"/>
-              <a:t>4.2 × 4</a:t>
+              <a:t>4,2 × 4</a:t>
             </a:r>
           </a:p>
         </p:txBody>
@@ -2609,7 +2609,7 @@
             <a:pPr algn="ctr"/>
             <a:r>
               <a:rPr lang="en-GB" sz="2000" dirty="0"/>
-              <a:t>4.2 × 0.4</a:t>
+              <a:t>4,2 × 0,4</a:t>
             </a:r>
           </a:p>
         </p:txBody>
@@ -2686,7 +2686,7 @@
             <a:pPr algn="ctr"/>
             <a:r>
               <a:rPr lang="en-GB" sz="2000" dirty="0"/>
-              <a:t>2.8 × 1.1</a:t>
+              <a:t>2,8 × 1,1</a:t>
             </a:r>
           </a:p>
         </p:txBody>
@@ -2763,7 +2763,7 @@
             <a:pPr algn="ctr"/>
             <a:r>
               <a:rPr lang="en-GB" sz="2000" dirty="0"/>
-              <a:t>3.15 × 2</a:t>
+              <a:t>3,15 × 2</a:t>
             </a:r>
           </a:p>
         </p:txBody>
@@ -2840,7 +2840,7 @@
             <a:pPr algn="ctr"/>
             <a:r>
               <a:rPr lang="en-GB" sz="2000" dirty="0"/>
-              <a:t>0.34 × 0.3</a:t>
+              <a:t>0,34 × 0,3</a:t>
             </a:r>
           </a:p>
         </p:txBody>
@@ -2917,7 +2917,7 @@
             <a:pPr algn="ctr"/>
             <a:r>
               <a:rPr lang="en-GB" sz="2000" dirty="0"/>
-              <a:t>0.12 × 0.12</a:t>
+              <a:t>0,12 × 0,12</a:t>
             </a:r>
           </a:p>
         </p:txBody>
@@ -3035,7 +3035,7 @@
             <a:pPr algn="ctr"/>
             <a:r>
               <a:rPr lang="en-GB" sz="2000" dirty="0"/>
-              <a:t>0.07 × 2.5</a:t>
+              <a:t>0,07 × 2,5</a:t>
             </a:r>
           </a:p>
         </p:txBody>
@@ -3112,7 +3112,7 @@
             <a:pPr algn="ctr"/>
             <a:r>
               <a:rPr lang="en-GB" sz="2000" dirty="0"/>
-              <a:t>0.27 × 1.8</a:t>
+              <a:t>0,27 × 1,8</a:t>
             </a:r>
           </a:p>
         </p:txBody>
@@ -3189,7 +3189,7 @@
             <a:pPr algn="ctr"/>
             <a:r>
               <a:rPr lang="en-GB" sz="2000" dirty="0"/>
-              <a:t>0.45 × 0.21</a:t>
+              <a:t>0,45 × 0,21</a:t>
             </a:r>
           </a:p>
         </p:txBody>
@@ -3266,7 +3266,7 @@
             <a:pPr algn="ctr"/>
             <a:r>
               <a:rPr lang="en-GB" sz="2000" dirty="0"/>
-              <a:t>3.48 × 0.3</a:t>
+              <a:t>3,48 × 0,3</a:t>
             </a:r>
           </a:p>
         </p:txBody>
@@ -3343,7 +3343,7 @@
             <a:pPr algn="ctr"/>
             <a:r>
               <a:rPr lang="en-GB" sz="2000" dirty="0"/>
-              <a:t>0.32 × 2.18</a:t>
+              <a:t>0,32 × 2,18</a:t>
             </a:r>
           </a:p>
         </p:txBody>
@@ -3420,7 +3420,7 @@
             <a:pPr algn="ctr"/>
             <a:r>
               <a:rPr lang="en-GB" sz="2000" dirty="0"/>
-              <a:t>4.7 × 3.61</a:t>
+              <a:t>4,7 × 3,61</a:t>
             </a:r>
           </a:p>
         </p:txBody>
@@ -3895,7 +3895,7 @@
             <a:pPr algn="ctr"/>
             <a:r>
               <a:rPr lang="en-GB" sz="2000" dirty="0"/>
-              <a:t>= 0.6</a:t>
+              <a:t>= 0,6</a:t>
             </a:r>
           </a:p>
         </p:txBody>
@@ -3931,7 +3931,7 @@
             <a:pPr algn="ctr"/>
             <a:r>
               <a:rPr lang="en-GB" sz="2000" dirty="0"/>
-              <a:t>6 × 0.1</a:t>
+              <a:t>6 × 0,1</a:t>
             </a:r>
           </a:p>
         </p:txBody>
@@ -4015,7 +4015,7 @@
             <a:pPr algn="ctr"/>
             <a:r>
               <a:rPr lang="en-GB" sz="2000" dirty="0"/>
-              <a:t>= 0.09</a:t>
+              <a:t>= 0,09</a:t>
             </a:r>
           </a:p>
         </p:txBody>
@@ -4051,7 +4051,7 @@
             <a:pPr algn="ctr"/>
             <a:r>
               <a:rPr lang="en-GB" sz="2000" dirty="0"/>
-              <a:t>9 × 0.01</a:t>
+              <a:t>9 × 0,01</a:t>
             </a:r>
           </a:p>
         </p:txBody>
@@ -4135,7 +4135,7 @@
             <a:pPr algn="ctr"/>
             <a:r>
               <a:rPr lang="en-GB" sz="2000" dirty="0"/>
-              <a:t>= 2.4</a:t>
+              <a:t>= 2,4</a:t>
             </a:r>
           </a:p>
         </p:txBody>
@@ -4171,7 +4171,7 @@
             <a:pPr algn="ctr"/>
             <a:r>
               <a:rPr lang="en-GB" sz="2000" dirty="0"/>
-              <a:t>8 × 0.3</a:t>
+              <a:t>8 × 0,3</a:t>
             </a:r>
           </a:p>
         </p:txBody>
@@ -4255,7 +4255,7 @@
             <a:pPr algn="ctr"/>
             <a:r>
               <a:rPr lang="en-GB" sz="2000" dirty="0"/>
-              <a:t>= 8.8</a:t>
+              <a:t>= 8,8</a:t>
             </a:r>
           </a:p>
         </p:txBody>
@@ -4291,7 +4291,7 @@
             <a:pPr algn="ctr"/>
             <a:r>
               <a:rPr lang="en-GB" sz="2000" dirty="0"/>
-              <a:t>2.2 × 4</a:t>
+              <a:t>2,2 × 4</a:t>
             </a:r>
           </a:p>
         </p:txBody>
@@ -4375,7 +4375,7 @@
             <a:pPr algn="ctr"/>
             <a:r>
               <a:rPr lang="en-GB" sz="2000" dirty="0"/>
-              <a:t>= 0.52</a:t>
+              <a:t>= 0,52</a:t>
             </a:r>
           </a:p>
         </p:txBody>
@@ -4411,7 +4411,7 @@
             <a:pPr algn="ctr"/>
             <a:r>
               <a:rPr lang="en-GB" sz="2000" dirty="0"/>
-              <a:t>0.26 × 2</a:t>
+              <a:t>0,26 × 2</a:t>
             </a:r>
           </a:p>
         </p:txBody>
@@ -4495,7 +4495,7 @@
             <a:pPr algn="ctr"/>
             <a:r>
               <a:rPr lang="en-GB" sz="2000" dirty="0"/>
-              <a:t>= 12.48</a:t>
+              <a:t>= 12,48</a:t>
             </a:r>
           </a:p>
         </p:txBody>
@@ -4531,7 +4531,7 @@
             <a:pPr algn="ctr"/>
             <a:r>
               <a:rPr lang="en-GB" sz="2000" dirty="0"/>
-              <a:t>3.12 × 4</a:t>
+              <a:t>3,12 × 4</a:t>
             </a:r>
           </a:p>
         </p:txBody>
@@ -4656,7 +4656,7 @@
             <a:pPr algn="ctr"/>
             <a:r>
               <a:rPr lang="en-GB" sz="2000" dirty="0"/>
-              <a:t>= 16.8</a:t>
+              <a:t>= 16,8</a:t>
             </a:r>
           </a:p>
         </p:txBody>
@@ -4692,7 +4692,7 @@
             <a:pPr algn="ctr"/>
             <a:r>
               <a:rPr lang="en-GB" sz="2000" dirty="0"/>
-              <a:t>4.2 × 4</a:t>
+              <a:t>4,2 × 4</a:t>
             </a:r>
           </a:p>
         </p:txBody>
@@ -4776,7 +4776,7 @@
             <a:pPr algn="ctr"/>
             <a:r>
               <a:rPr lang="en-GB" sz="2000" dirty="0"/>
-              <a:t>= 1.68</a:t>
+              <a:t>= 1,68</a:t>
             </a:r>
           </a:p>
         </p:txBody>
@@ -4812,7 +4812,7 @@
             <a:pPr algn="ctr"/>
             <a:r>
               <a:rPr lang="en-GB" sz="2000" dirty="0"/>
-              <a:t>4.2 × 0.4</a:t>
+              <a:t>4,2 × 0,4</a:t>
             </a:r>
           </a:p>
         </p:txBody>
@@ -4896,7 +4896,7 @@
             <a:pPr algn="ctr"/>
             <a:r>
               <a:rPr lang="en-GB" sz="2000" dirty="0"/>
-              <a:t>= 3.08</a:t>
+              <a:t>= 3,08</a:t>
             </a:r>
           </a:p>
         </p:txBody>
@@ -4932,7 +4932,7 @@
             <a:pPr algn="ctr"/>
             <a:r>
               <a:rPr lang="en-GB" sz="2000" dirty="0"/>
-              <a:t>2.8 × 1.1</a:t>
+              <a:t>2,8 × 1,1</a:t>
             </a:r>
           </a:p>
         </p:txBody>
@@ -5016,7 +5016,7 @@
             <a:pPr algn="ctr"/>
             <a:r>
               <a:rPr lang="en-GB" sz="2000" dirty="0"/>
-              <a:t>= 6.3</a:t>
+              <a:t>= 6,3</a:t>
             </a:r>
           </a:p>
         </p:txBody>
@@ -5052,7 +5052,7 @@
             <a:pPr algn="ctr"/>
             <a:r>
               <a:rPr lang="en-GB" sz="2000" dirty="0"/>
-              <a:t>3.15 × 2</a:t>
+              <a:t>3,15 × 2</a:t>
             </a:r>
           </a:p>
         </p:txBody>
@@ -5136,7 +5136,7 @@
             <a:pPr algn="ctr"/>
             <a:r>
               <a:rPr lang="en-GB" sz="2000" dirty="0"/>
-              <a:t>= 0.102</a:t>
+              <a:t>= 0,102</a:t>
             </a:r>
           </a:p>
         </p:txBody>
@@ -5172,7 +5172,7 @@
             <a:pPr algn="ctr"/>
             <a:r>
               <a:rPr lang="en-GB" sz="2000" dirty="0"/>
-              <a:t>0.34 × 0.3</a:t>
+              <a:t>0,34 × 0,3</a:t>
             </a:r>
           </a:p>
         </p:txBody>
@@ -5256,7 +5256,7 @@
             <a:pPr algn="ctr"/>
             <a:r>
               <a:rPr lang="en-GB" sz="2000" dirty="0"/>
-              <a:t>= 0.0144</a:t>
+              <a:t>= 0,0144</a:t>
             </a:r>
           </a:p>
         </p:txBody>
@@ -5292,7 +5292,7 @@
             <a:pPr algn="ctr"/>
             <a:r>
               <a:rPr lang="en-GB" sz="2000" dirty="0"/>
-              <a:t>0.12 × 0.12</a:t>
+              <a:t>0,12 × 0,12</a:t>
             </a:r>
           </a:p>
         </p:txBody>
@@ -5416,7 +5416,7 @@
           <a:p>
             <a:r>
               <a:rPr lang="en-GB" sz="2000" dirty="0"/>
-              <a:t>= 0.175</a:t>
+              <a:t>= 0,175</a:t>
             </a:r>
           </a:p>
         </p:txBody>
@@ -5452,7 +5452,7 @@
             <a:pPr algn="ctr"/>
             <a:r>
               <a:rPr lang="en-GB" sz="2000" dirty="0"/>
-              <a:t>0.07 × 2.5</a:t>
+              <a:t>0,07 × 2,5</a:t>
             </a:r>
           </a:p>
         </p:txBody>
@@ -5535,7 +5535,7 @@
           <a:p>
             <a:r>
               <a:rPr lang="en-GB" sz="2000" dirty="0"/>
-              <a:t>= 0.486</a:t>
+              <a:t>= 0,486</a:t>
             </a:r>
           </a:p>
         </p:txBody>
@@ -5571,7 +5571,7 @@
             <a:pPr algn="ctr"/>
             <a:r>
               <a:rPr lang="en-GB" sz="2000" dirty="0"/>
-              <a:t>0.27 × 1.8</a:t>
+              <a:t>0,27 × 1,8</a:t>
             </a:r>
           </a:p>
         </p:txBody>
@@ -5654,7 +5654,7 @@
           <a:p>
             <a:r>
               <a:rPr lang="en-GB" sz="2000" dirty="0"/>
-              <a:t>= 0.0945</a:t>
+              <a:t>= 0,0945</a:t>
             </a:r>
           </a:p>
         </p:txBody>
@@ -5690,7 +5690,7 @@
             <a:pPr algn="ctr"/>
             <a:r>
               <a:rPr lang="en-GB" sz="2000" dirty="0"/>
-              <a:t>0.45 × 0.21</a:t>
+              <a:t>0,45 × 0,21</a:t>
             </a:r>
           </a:p>
         </p:txBody>
@@ -5773,7 +5773,7 @@
           <a:p>
             <a:r>
               <a:rPr lang="en-GB" sz="2000" dirty="0"/>
-              <a:t>= 1.044</a:t>
+              <a:t>= 1,044</a:t>
             </a:r>
           </a:p>
         </p:txBody>
@@ -5809,7 +5809,7 @@
             <a:pPr algn="ctr"/>
             <a:r>
               <a:rPr lang="en-GB" sz="2000" dirty="0"/>
-              <a:t>3.48 × 0.3</a:t>
+              <a:t>3,48 × 0,3</a:t>
             </a:r>
           </a:p>
         </p:txBody>
@@ -5892,7 +5892,7 @@
           <a:p>
             <a:r>
               <a:rPr lang="en-GB" sz="2000" dirty="0"/>
-              <a:t>= 0.6976</a:t>
+              <a:t>= 0,6976</a:t>
             </a:r>
           </a:p>
         </p:txBody>
@@ -5928,7 +5928,7 @@
             <a:pPr algn="ctr"/>
             <a:r>
               <a:rPr lang="en-GB" sz="2000" dirty="0"/>
-              <a:t>0.32 × 2.18</a:t>
+              <a:t>0,32 × 2,18</a:t>
             </a:r>
           </a:p>
         </p:txBody>
@@ -6011,7 +6011,7 @@
           <a:p>
             <a:r>
               <a:rPr lang="en-GB" sz="2000" dirty="0"/>
-              <a:t>= 16.967</a:t>
+              <a:t>= 16,967</a:t>
             </a:r>
           </a:p>
         </p:txBody>
@@ -6047,7 +6047,7 @@
             <a:pPr algn="ctr"/>
             <a:r>
               <a:rPr lang="en-GB" sz="2000" dirty="0"/>
-              <a:t>4.7 × 3.61</a:t>
+              <a:t>4,7 × 3,61</a:t>
             </a:r>
           </a:p>
         </p:txBody>
